--- a/decks/hist-hastings/hist-hastings_ch3_stamford-bridge.pptx
+++ b/decks/hist-hastings/hist-hastings_ch3_stamford-bridge.pptx
@@ -125,30 +125,30 @@
   <p:extLst>
     <p:ext uri="{521415D9-36F7-43E2-AB2F-B90AF26B5E84}">
       <p14:sectionLst xmlns:p14="http://schemas.microsoft.com/office/powerpoint/2010/main">
-        <p14:section name="Opening" id="{43a920ef-b336-3d7b-3b4b-0295f10e48e5}">
+        <p14:section name="Opening" id="{191ba918-b551-aac8-f2b6-d843baa087fc}">
           <p14:sldIdLst>
             <p14:sldId id="256"/>
           </p14:sldIdLst>
         </p14:section>
-        <p14:section name="Gate" id="{af76294f-1c75-1932-89a7-39c5203d02a7}">
+        <p14:section name="Gate" id="{8fe8ed4f-dd1e-6936-d684-eab8aa416f2b}">
           <p14:sldIdLst>
             <p14:sldId id="257"/>
             <p14:sldId id="258"/>
           </p14:sldIdLst>
         </p14:section>
-        <p14:section name="Pre-teach" id="{683bf901-e707-65d9-fc60-bc49be7da2a8}">
+        <p14:section name="Pre-teach" id="{310e1600-fc75-e65f-677e-4c4042d8987d}">
           <p14:sldIdLst>
             <p14:sldId id="259"/>
             <p14:sldId id="260"/>
           </p14:sldIdLst>
         </p14:section>
-        <p14:section name="Read-along" id="{e2e1384e-e18a-fc45-27df-85eeacd0883f}">
+        <p14:section name="Read-along" id="{2d9d36b1-dcf9-b6b9-c17b-7a900ebf21f0}">
           <p14:sldIdLst>
             <p14:sldId id="261"/>
             <p14:sldId id="262"/>
           </p14:sldIdLst>
         </p14:section>
-        <p14:section name="Teach" id="{b18b5a82-6fb1-6bbe-941e-4b499f8205fc}">
+        <p14:section name="Teach" id="{80b8985b-e54d-4cb1-4e78-3fe4fa256f42}">
           <p14:sldIdLst>
             <p14:sldId id="263"/>
             <p14:sldId id="264"/>
@@ -156,7 +156,7 @@
             <p14:sldId id="266"/>
           </p14:sldIdLst>
         </p14:section>
-        <p14:section name="Routes" id="{26d8ad07-722c-6949-424f-9460cd08b29e}">
+        <p14:section name="Routes" id="{8b9264aa-fb2b-fa40-6ba0-bd20473288fd}">
           <p14:sldIdLst>
             <p14:sldId id="267"/>
             <p14:sldId id="268"/>
@@ -164,12 +164,12 @@
             <p14:sldId id="270"/>
           </p14:sldIdLst>
         </p14:section>
-        <p14:section name="Close" id="{c0b5ead5-ab5d-52d0-d1ab-5bc0697e24dc}">
+        <p14:section name="Close" id="{a445b153-ea6c-3e2f-e604-5a85c96b63a2}">
           <p14:sldIdLst>
             <p14:sldId id="271"/>
           </p14:sldIdLst>
         </p14:section>
-        <p14:section name="Answers" id="{3592c964-ace0-1e98-eee8-f461293c28f9}">
+        <p14:section name="Answers" id="{d497bb9e-e91c-e932-02a7-2d1a36fd48e5}">
           <p14:sldIdLst>
             <p14:sldId id="272"/>
             <p14:sldId id="273"/>
@@ -1233,7 +1233,7 @@
               <a:rPr lang="en-US" dirty="0"/>
               <a:t>Exit ticket — individual, silent, on a slip or mini-whiteboard. Recall before help: no notes, no lanes, no hints. Collect before pupils leave.
 Question: What happened on 18 September 1066?
-Answer: D   Hardrada's Vikings invaded the north of England. Hardrada landed in the north on 18 September, ten days after Harold sent his army home, and soon took York.
+Answer: B   Hardrada's Vikings invaded the north of England. Hardrada landed in the north on 18 September, ten days after Harold sent his army home, and soon took York.
 Source of this question: gate item 1 re-asked (options rotated) — this chapter has no third quick-check module.
 The ebook also holds task 3, "Why did Harold win? The paragraph", for homework or the next lesson's do now.
 Sort the slips: correct → ready to move on; incorrect → start next lesson in the pre-teach group, with the read-along and the Support lane. Same destination next time.</a:t>
@@ -1416,7 +1416,7 @@
             <a:r>
               <a:rPr lang="en-US" dirty="0"/>
               <a:t>Answers — task 2: Rank the reasons. Reveal the answer; pupils mark their own work in a different colour, then read the "why" together. Same destination for every lane, so one answer serves the whole class.
-Answer: A   Harold marched north very quickly, in five days, to take the Vikings by surprise
+Answer: B   Harold marched north very quickly, in five days, to take the Vikings by surprise
 Why: Harold's speed caused the surprise; the surprise meant the Vikings had no armour on; that let English weapons break the shield wall; and the fighting ended when Hardrada was killed. The march came first and made the rest possible.
 Ask a Support pupil to explain one step, and a Stretch pupil to share their extension.</a:t>
             </a:r>
@@ -1507,7 +1507,7 @@
             <a:r>
               <a:rPr lang="en-US" dirty="0"/>
               <a:t>Answers — exit ticket: Exit ticket. Reveal the answer; pupils mark their own work in a different colour, then read the "why" together. Same destination for every lane, so one answer serves the whole class.
-Answer: D   Hardrada's Vikings invaded the north of England
+Answer: B   Hardrada's Vikings invaded the north of England
 Why: Hardrada landed in the north on 18 September, ten days after Harold sent his army home, and soon took York.
 Ask a Support pupil to explain one step, and a Stretch pupil to share their extension.</a:t>
             </a:r>
@@ -1598,7 +1598,7 @@
             <a:r>
               <a:rPr lang="en-US" dirty="0"/>
               <a:t>Do now — retrieval. Silent, no notes, no help: recall comes before any support. Give about four minutes.
-1. What happened on 18 September 1066?  →  A   Hardrada's Vikings invaded the north of England
+1. What happened on 18 September 1066?  →  C   Hardrada's Vikings invaded the north of England
 2. Hardrada landed on 18 September and the Battle of Stamford Bridge was fought on 25 September. How many days apart were these two events?  →  7 days
 3. Harald Hardrada was killed by an ___ at the Battle of Stamford Bridge.  →  arrow
 Circulate: who gets 3/3 (Stretch route), 2/3 (Core), 0–1 (Support)? Use this to route pupils later in the lesson.</a:t>
@@ -1690,7 +1690,7 @@
             <a:r>
               <a:rPr lang="en-US" dirty="0"/>
               <a:t>Answers — pupils mark their own in a different colour, then hands up for 3/3, 2/3, 1/3.
-1. A   Hardrada's Vikings invaded the north of England. Hardrada landed in the north on 18 September, ten days after Harold sent his army home, and soon took York.
+1. C   Hardrada's Vikings invaded the north of England. Hardrada landed in the north on 18 September, ten days after Harold sent his army home, and soon took York.
 2. 7 days. 25 − 18 = 7. Harold spent five of those seven days marching north.
 3. arrow. Hardrada was killed by an arrow. Without their king, the Viking army was defeated.
 Say the route each score points to: 3/3 Stretch, 2/3 Core, 0–1 Support. Pupils may choose to move up.</a:t>
@@ -7087,7 +7087,7 @@
                 <a:ea typeface="Calibri" pitchFamily="34" charset="-122"/>
                 <a:cs typeface="Calibri" pitchFamily="34" charset="-120"/>
               </a:rPr>
-              <a:t>Harold marched north very quickly, in five days, to take the Vikings by surprise</a:t>
+              <a:t>The Viking warrior on the bridge was killed</a:t>
             </a:r>
             <a:endParaRPr lang="en-US" sz="2600" dirty="0"/>
           </a:p>
@@ -7124,7 +7124,7 @@
                 <a:ea typeface="Calibri" pitchFamily="34" charset="-122"/>
                 <a:cs typeface="Calibri" pitchFamily="34" charset="-120"/>
               </a:rPr>
-              <a:t>Hardrada was killed by an arrow</a:t>
+              <a:t>Harold marched north very quickly, in five days, to take the Vikings by surprise</a:t>
             </a:r>
             <a:endParaRPr lang="en-US" sz="2600" dirty="0"/>
           </a:p>
@@ -7198,7 +7198,7 @@
                 <a:ea typeface="Calibri" pitchFamily="34" charset="-122"/>
                 <a:cs typeface="Calibri" pitchFamily="34" charset="-120"/>
               </a:rPr>
-              <a:t>The Viking warrior on the bridge was killed</a:t>
+              <a:t>Hardrada was killed by an arrow</a:t>
             </a:r>
             <a:endParaRPr lang="en-US" sz="2600" dirty="0"/>
           </a:p>
@@ -8565,7 +8565,7 @@
                 <a:ea typeface="Calibri" pitchFamily="34" charset="-122"/>
                 <a:cs typeface="Calibri" pitchFamily="34" charset="-120"/>
               </a:rPr>
-              <a:t>William landed in the south of England</a:t>
+              <a:t>The Battle of Stamford Bridge was fought</a:t>
             </a:r>
             <a:endParaRPr lang="en-US" sz="2400" dirty="0"/>
           </a:p>
@@ -8602,7 +8602,7 @@
                 <a:ea typeface="Calibri" pitchFamily="34" charset="-122"/>
                 <a:cs typeface="Calibri" pitchFamily="34" charset="-120"/>
               </a:rPr>
-              <a:t>Harold was crowned king</a:t>
+              <a:t>Hardrada's Vikings invaded the north of England</a:t>
             </a:r>
             <a:endParaRPr lang="en-US" sz="2400" dirty="0"/>
           </a:p>
@@ -8639,7 +8639,7 @@
                 <a:ea typeface="Calibri" pitchFamily="34" charset="-122"/>
                 <a:cs typeface="Calibri" pitchFamily="34" charset="-120"/>
               </a:rPr>
-              <a:t>The Battle of Stamford Bridge was fought</a:t>
+              <a:t>Harold was crowned king</a:t>
             </a:r>
             <a:endParaRPr lang="en-US" sz="2400" dirty="0"/>
           </a:p>
@@ -8676,7 +8676,7 @@
                 <a:ea typeface="Calibri" pitchFamily="34" charset="-122"/>
                 <a:cs typeface="Calibri" pitchFamily="34" charset="-120"/>
               </a:rPr>
-              <a:t>Hardrada's Vikings invaded the north of England</a:t>
+              <a:t>William landed in the south of England</a:t>
             </a:r>
             <a:endParaRPr lang="en-US" sz="2400" dirty="0"/>
           </a:p>
@@ -9688,7 +9688,7 @@
                 <a:ea typeface="Cambria" pitchFamily="34" charset="-122"/>
                 <a:cs typeface="Cambria" pitchFamily="34" charset="-120"/>
               </a:rPr>
-              <a:t>A   Harold marched north very quickly, in five days, to take the Vikings by surprise</a:t>
+              <a:t>B   Harold marched north very quickly, in five days, to take the Vikings by surprise</a:t>
             </a:r>
             <a:endParaRPr lang="en-US" sz="1800" dirty="0"/>
           </a:p>
@@ -10147,7 +10147,7 @@
                 <a:ea typeface="Cambria" pitchFamily="34" charset="-122"/>
                 <a:cs typeface="Cambria" pitchFamily="34" charset="-120"/>
               </a:rPr>
-              <a:t>D   Hardrada's Vikings invaded the north of England</a:t>
+              <a:t>B   Hardrada's Vikings invaded the north of England</a:t>
             </a:r>
             <a:endParaRPr lang="en-US" sz="1800" dirty="0"/>
           </a:p>
@@ -10681,7 +10681,7 @@
                 <a:ea typeface="Calibri" pitchFamily="34" charset="-122"/>
                 <a:cs typeface="Calibri" pitchFamily="34" charset="-120"/>
               </a:rPr>
-              <a:t>Hardrada's Vikings invaded the north of England</a:t>
+              <a:t>William landed in the south of England</a:t>
             </a:r>
             <a:endParaRPr lang="en-US" sz="1800" dirty="0"/>
           </a:p>
@@ -10718,7 +10718,7 @@
                 <a:ea typeface="Calibri" pitchFamily="34" charset="-122"/>
                 <a:cs typeface="Calibri" pitchFamily="34" charset="-120"/>
               </a:rPr>
-              <a:t>William landed in the south of England</a:t>
+              <a:t>The Battle of Stamford Bridge was fought</a:t>
             </a:r>
             <a:endParaRPr lang="en-US" sz="1800" dirty="0"/>
           </a:p>
@@ -10755,7 +10755,7 @@
                 <a:ea typeface="Calibri" pitchFamily="34" charset="-122"/>
                 <a:cs typeface="Calibri" pitchFamily="34" charset="-120"/>
               </a:rPr>
-              <a:t>Harold was crowned king</a:t>
+              <a:t>Hardrada's Vikings invaded the north of England</a:t>
             </a:r>
             <a:endParaRPr lang="en-US" sz="1800" dirty="0"/>
           </a:p>
@@ -10792,7 +10792,7 @@
                 <a:ea typeface="Calibri" pitchFamily="34" charset="-122"/>
                 <a:cs typeface="Calibri" pitchFamily="34" charset="-120"/>
               </a:rPr>
-              <a:t>The Battle of Stamford Bridge was fought</a:t>
+              <a:t>Harold was crowned king</a:t>
             </a:r>
             <a:endParaRPr lang="en-US" sz="1800" dirty="0"/>
           </a:p>
@@ -11589,7 +11589,7 @@
                 <a:ea typeface="Calibri" pitchFamily="34" charset="-122"/>
                 <a:cs typeface="Calibri" pitchFamily="34" charset="-120"/>
               </a:rPr>
-              <a:t>A   Hardrada's Vikings invaded the north of England</a:t>
+              <a:t>C   Hardrada's Vikings invaded the north of England</a:t>
             </a:r>
             <a:endParaRPr lang="en-US" sz="2200" dirty="0"/>
           </a:p>

--- a/decks/hist-hastings/hist-hastings_ch3_stamford-bridge.pptx
+++ b/decks/hist-hastings/hist-hastings_ch3_stamford-bridge.pptx
@@ -125,30 +125,30 @@
   <p:extLst>
     <p:ext uri="{521415D9-36F7-43E2-AB2F-B90AF26B5E84}">
       <p14:sectionLst xmlns:p14="http://schemas.microsoft.com/office/powerpoint/2010/main">
-        <p14:section name="Opening" id="{191ba918-b551-aac8-f2b6-d843baa087fc}">
+        <p14:section name="Opening" id="{57f16640-9072-e4e2-95fe-fda5f70c0178}">
           <p14:sldIdLst>
             <p14:sldId id="256"/>
           </p14:sldIdLst>
         </p14:section>
-        <p14:section name="Gate" id="{8fe8ed4f-dd1e-6936-d684-eab8aa416f2b}">
+        <p14:section name="Gate" id="{a44ff3f8-99ab-8610-bebd-3e00252677e0}">
           <p14:sldIdLst>
             <p14:sldId id="257"/>
             <p14:sldId id="258"/>
           </p14:sldIdLst>
         </p14:section>
-        <p14:section name="Pre-teach" id="{310e1600-fc75-e65f-677e-4c4042d8987d}">
+        <p14:section name="Pre-teach" id="{1f6b4117-6130-18d8-f9c2-de90c09f1ea9}">
           <p14:sldIdLst>
             <p14:sldId id="259"/>
             <p14:sldId id="260"/>
           </p14:sldIdLst>
         </p14:section>
-        <p14:section name="Read-along" id="{2d9d36b1-dcf9-b6b9-c17b-7a900ebf21f0}">
+        <p14:section name="Read-along" id="{6ac87ad5-63e4-1797-bf32-c85ecffef7bc}">
           <p14:sldIdLst>
             <p14:sldId id="261"/>
             <p14:sldId id="262"/>
           </p14:sldIdLst>
         </p14:section>
-        <p14:section name="Teach" id="{80b8985b-e54d-4cb1-4e78-3fe4fa256f42}">
+        <p14:section name="Teach" id="{3c1e1142-dcde-c0a7-380a-9cb21b321cef}">
           <p14:sldIdLst>
             <p14:sldId id="263"/>
             <p14:sldId id="264"/>
@@ -156,7 +156,7 @@
             <p14:sldId id="266"/>
           </p14:sldIdLst>
         </p14:section>
-        <p14:section name="Routes" id="{8b9264aa-fb2b-fa40-6ba0-bd20473288fd}">
+        <p14:section name="Routes" id="{f3556e6c-74ec-d725-26eb-f20a947f231f}">
           <p14:sldIdLst>
             <p14:sldId id="267"/>
             <p14:sldId id="268"/>
@@ -164,12 +164,12 @@
             <p14:sldId id="270"/>
           </p14:sldIdLst>
         </p14:section>
-        <p14:section name="Close" id="{a445b153-ea6c-3e2f-e604-5a85c96b63a2}">
+        <p14:section name="Close" id="{958bce20-ca77-4652-2fd0-e5804f271712}">
           <p14:sldIdLst>
             <p14:sldId id="271"/>
           </p14:sldIdLst>
         </p14:section>
-        <p14:section name="Answers" id="{d497bb9e-e91c-e932-02a7-2d1a36fd48e5}">
+        <p14:section name="Answers" id="{52a4381c-931d-704b-0a83-f628f4d24081}">
           <p14:sldIdLst>
             <p14:sldId id="272"/>
             <p14:sldId id="273"/>
